--- a/assets/agilecampus-kaiti.pptx
+++ b/assets/agilecampus-kaiti.pptx
@@ -6913,7 +6913,7 @@
                 <a:ea typeface="宋体" panose="02010600030101010101" pitchFamily="2" charset="-122"/>
                 <a:cs typeface="+mn-lt"/>
               </a:rPr>
-              <a:t>曾瑞鑫、王杰锋</a:t>
+              <a:t>曾瑞鑫、玉杰锋</a:t>
             </a:r>
             <a:r>
               <a:rPr lang="en-US" altLang="zh-CN" sz="1400" b="1" spc="24">
